--- a/decks/hist-vikings-saxons/hist-vikings-saxons_ch1_chronology.pptx
+++ b/decks/hist-vikings-saxons/hist-vikings-saxons_ch1_chronology.pptx
@@ -125,30 +125,30 @@
   <p:extLst>
     <p:ext uri="{521415D9-36F7-43E2-AB2F-B90AF26B5E84}">
       <p14:sectionLst xmlns:p14="http://schemas.microsoft.com/office/powerpoint/2010/main">
-        <p14:section name="Opening" id="{ba3bc2cb-efa2-7bca-4feb-15480ead5457}">
+        <p14:section name="Opening" id="{5131035d-2435-8878-8824-eef687a7b790}">
           <p14:sldIdLst>
             <p14:sldId id="256"/>
           </p14:sldIdLst>
         </p14:section>
-        <p14:section name="Gate" id="{39b3aa73-3b40-d834-12c0-b8cf41e4d347}">
+        <p14:section name="Gate" id="{046af9a9-93a2-565c-dc1f-cf12ffc5e25b}">
           <p14:sldIdLst>
             <p14:sldId id="257"/>
             <p14:sldId id="258"/>
           </p14:sldIdLst>
         </p14:section>
-        <p14:section name="Pre-teach" id="{4a3272cb-0330-ac87-acfe-8a039518c03d}">
+        <p14:section name="Pre-teach" id="{2bda0d63-1240-0d26-f1b9-a3644ee6dc0c}">
           <p14:sldIdLst>
             <p14:sldId id="259"/>
             <p14:sldId id="260"/>
           </p14:sldIdLst>
         </p14:section>
-        <p14:section name="Read-along" id="{16800b79-3d2a-0a0d-5d2d-49976f560db8}">
+        <p14:section name="Read-along" id="{ead0619f-1abc-0e93-24ef-3b2b6d153d40}">
           <p14:sldIdLst>
             <p14:sldId id="261"/>
             <p14:sldId id="262"/>
           </p14:sldIdLst>
         </p14:section>
-        <p14:section name="Teach" id="{6ce2084b-7b3b-448e-70cd-f47c3d0c6bc2}">
+        <p14:section name="Teach" id="{96f4d941-9a3d-bc73-82ba-b0171f881038}">
           <p14:sldIdLst>
             <p14:sldId id="263"/>
             <p14:sldId id="264"/>
@@ -157,19 +157,19 @@
             <p14:sldId id="267"/>
           </p14:sldIdLst>
         </p14:section>
-        <p14:section name="Routes" id="{a2e19642-ac2f-1a06-875f-43152cac0e09}">
+        <p14:section name="Routes" id="{00fee2dc-c1eb-6ffd-a34b-98b1c821412e}">
           <p14:sldIdLst>
             <p14:sldId id="268"/>
             <p14:sldId id="269"/>
             <p14:sldId id="270"/>
           </p14:sldIdLst>
         </p14:section>
-        <p14:section name="Close" id="{03b14b55-a327-3818-a511-89e1413c59a4}">
+        <p14:section name="Close" id="{666535b6-8b3c-d60f-23d8-a8cc6ab53d72}">
           <p14:sldIdLst>
             <p14:sldId id="271"/>
           </p14:sldIdLst>
         </p14:section>
-        <p14:section name="Answers" id="{83016185-712b-3375-4bbc-75e3e5cfab3c}">
+        <p14:section name="Answers" id="{62c23089-cd1b-41b7-3c0b-3b3794f1136c}">
           <p14:sldIdLst>
             <p14:sldId id="272"/>
             <p14:sldId id="273"/>
